--- a/presentation/out/Akulchev_karta_riska_avtomatiki_pilot.pptx
+++ b/presentation/out/Akulchev_karta_riska_avtomatiki_pilot.pptx
@@ -116,32 +116,32 @@
   <p:extLst>
     <p:ext uri="{521415D9-36F7-43E2-AB2F-B90AF26B5E84}">
       <p14:sectionLst xmlns:p14="http://schemas.microsoft.com/office/powerpoint/2010/main">
-        <p14:section name="Контекст" id="{f05c1c29-9673-58cc-b1ff-bcba94387e17}">
+        <p14:section name="Контекст" id="{728f97bc-83c0-bf83-2468-32f1a30ecc7e}">
           <p14:sldIdLst>
             <p14:sldId id="256"/>
             <p14:sldId id="257"/>
           </p14:sldIdLst>
         </p14:section>
-        <p14:section name="Что и как проверяем" id="{05dfc418-b05c-989a-a1df-b25450d3db3a}">
+        <p14:section name="Что и как проверяем" id="{3c8cc4bb-b254-51a4-212e-a842621350a7}">
           <p14:sldIdLst>
             <p14:sldId id="258"/>
             <p14:sldId id="259"/>
             <p14:sldId id="260"/>
           </p14:sldIdLst>
         </p14:section>
-        <p14:section name="Результат" id="{2251326f-998f-9466-1ba6-4d6eda44cadc}">
+        <p14:section name="Результат" id="{8b5e6b08-90a0-4ba5-2189-f7e94bf3da78}">
           <p14:sldIdLst>
             <p14:sldId id="261"/>
             <p14:sldId id="262"/>
           </p14:sldIdLst>
         </p14:section>
-        <p14:section name="Пилот и условия" id="{29030bfb-6f4b-19c8-3e7f-0fea4ad9a9cc}">
+        <p14:section name="Пилот и условия" id="{1dc9cac3-9a8e-3e74-8a71-92d71ac1e64a}">
           <p14:sldIdLst>
             <p14:sldId id="263"/>
             <p14:sldId id="264"/>
           </p14:sldIdLst>
         </p14:section>
-        <p14:section name="Приложение" id="{17caeb48-e5ca-6444-cadd-5628e2fb8741}">
+        <p14:section name="Приложение" id="{2788dce0-dcd5-1f2f-4cae-31affabfaff1}">
           <p14:sldIdLst>
             <p14:sldId id="265"/>
           </p14:sldIdLst>
@@ -2527,118 +2527,32 @@
           <a:chExt cx="0" cy="0"/>
         </a:xfrm>
       </p:grpSpPr>
-      <p:sp>
-        <p:nvSpPr>
-          <p:cNvPr id="2" name="img-placeholder-s1"/>
-          <p:cNvSpPr/>
-          <p:nvPr/>
-        </p:nvSpPr>
+      <p:pic>
+        <p:nvPicPr>
+          <p:cNvPr id="2" name="photo-s1" descr="/home/user/mysteryslavic-2026-07-19_16-47-00/presentation/images/01-title.jpg">    </p:cNvPr>
+          <p:cNvPicPr>
+            <a:picLocks noChangeAspect="1"/>
+          </p:cNvPicPr>
+          <p:nvPr/>
+        </p:nvPicPr>
+        <p:blipFill>
+          <a:blip r:embed="rId1"/>
+          <a:srcRect l="0" r="0" t="0" b="0"/>
+          <a:stretch/>
+        </p:blipFill>
         <p:spPr>
           <a:xfrm>
             <a:off x="6446520" y="0"/>
             <a:ext cx="5742432" cy="6858000"/>
           </a:xfrm>
-          <a:prstGeom prst="roundRect">
-            <a:avLst>
-              <a:gd name="adj" fmla="val 955"/>
-            </a:avLst>
-          </a:prstGeom>
-          <a:solidFill>
-            <a:srgbClr val="263241"/>
-          </a:solidFill>
-          <a:ln w="12700">
-            <a:solidFill>
-              <a:srgbClr val="3C4A5C"/>
-            </a:solidFill>
-            <a:prstDash val="dash"/>
-          </a:ln>
-        </p:spPr>
-      </p:sp>
-      <p:sp>
-        <p:nvSpPr>
-          <p:cNvPr id="3" name="Text 1"/>
-          <p:cNvSpPr txBox="1"/>
-          <p:nvPr/>
-        </p:nvSpPr>
-        <p:spPr>
-          <a:xfrm>
-            <a:off x="6611112" y="0"/>
-            <a:ext cx="5413248" cy="6858000"/>
-          </a:xfrm>
-          <a:prstGeom prst="rect">
-            <a:avLst/>
-          </a:prstGeom>
-          <a:noFill/>
-          <a:ln/>
-        </p:spPr>
-        <p:txBody>
-          <a:bodyPr wrap="square" lIns="0" tIns="0" rIns="0" bIns="0" rtlCol="0" anchor="ctr"/>
-          <a:lstStyle/>
-          <a:p>
-            <a:pPr algn="ctr" indent="0" marL="0">
-              <a:lnSpc>
-                <a:spcPct val="125000"/>
-              </a:lnSpc>
-              <a:buNone/>
-            </a:pPr>
-            <a:r>
-              <a:rPr lang="en-US" sz="1000" dirty="0">
-                <a:solidFill>
-                  <a:srgbClr val="A8B6C4"/>
-                </a:solidFill>
-                <a:latin typeface="Arial" pitchFamily="34" charset="0"/>
-                <a:ea typeface="Arial" pitchFamily="34" charset="-122"/>
-                <a:cs typeface="Arial" pitchFamily="34" charset="-120"/>
-              </a:rPr>
-              <a:t>IMAGE 01 · 16:9</a:t>
-            </a:r>
-            <a:endParaRPr lang="en-US" sz="1000" dirty="0"/>
-          </a:p>
-          <a:p>
-            <a:pPr algn="ctr" indent="0" marL="0">
-              <a:lnSpc>
-                <a:spcPct val="125000"/>
-              </a:lnSpc>
-              <a:buNone/>
-            </a:pPr>
-            <a:r>
-              <a:rPr lang="en-US" sz="1000" dirty="0">
-                <a:solidFill>
-                  <a:srgbClr val="A8B6C4"/>
-                </a:solidFill>
-                <a:latin typeface="Arial" pitchFamily="34" charset="0"/>
-                <a:ea typeface="Arial" pitchFamily="34" charset="-122"/>
-                <a:cs typeface="Arial" pitchFamily="34" charset="-120"/>
-              </a:rPr>
-              <a:t>Цех, открытый шкаф автоматики,</a:t>
-            </a:r>
-            <a:endParaRPr lang="en-US" sz="1000" dirty="0"/>
-          </a:p>
-          <a:p>
-            <a:pPr algn="ctr" indent="0" marL="0">
-              <a:lnSpc>
-                <a:spcPct val="125000"/>
-              </a:lnSpc>
-              <a:buNone/>
-            </a:pPr>
-            <a:r>
-              <a:rPr lang="en-US" sz="1000" dirty="0">
-                <a:solidFill>
-                  <a:srgbClr val="A8B6C4"/>
-                </a:solidFill>
-                <a:latin typeface="Arial" pitchFamily="34" charset="0"/>
-                <a:ea typeface="Arial" pitchFamily="34" charset="-122"/>
-                <a:cs typeface="Arial" pitchFamily="34" charset="-120"/>
-              </a:rPr>
-              <a:t>инженер сбоку. Свободное поле слева.</a:t>
-            </a:r>
-            <a:endParaRPr lang="en-US" sz="1000" dirty="0"/>
-          </a:p>
-        </p:txBody>
-      </p:sp>
-      <p:sp>
-        <p:nvSpPr>
-          <p:cNvPr id="4" name="title-scrim"/>
+          <a:prstGeom prst="rect">
+            <a:avLst/>
+          </a:prstGeom>
+        </p:spPr>
+      </p:pic>
+      <p:sp>
+        <p:nvSpPr>
+          <p:cNvPr id="3" name="title-scrim"/>
           <p:cNvSpPr/>
           <p:nvPr/>
         </p:nvSpPr>
@@ -2663,7 +2577,7 @@
       </p:sp>
       <p:sp>
         <p:nvSpPr>
-          <p:cNvPr id="5" name="Text 3"/>
+          <p:cNvPr id="4" name="Text 1"/>
           <p:cNvSpPr txBox="1"/>
           <p:nvPr/>
         </p:nvSpPr>
@@ -2702,7 +2616,7 @@
       </p:sp>
       <p:sp>
         <p:nvSpPr>
-          <p:cNvPr id="6" name="Text 4"/>
+          <p:cNvPr id="5" name="Text 2"/>
           <p:cNvSpPr txBox="1"/>
           <p:nvPr/>
         </p:nvSpPr>
@@ -2804,7 +2718,7 @@
       </p:sp>
       <p:sp>
         <p:nvSpPr>
-          <p:cNvPr id="7" name="Text 5"/>
+          <p:cNvPr id="6" name="Text 3"/>
           <p:cNvSpPr txBox="1"/>
           <p:nvPr/>
         </p:nvSpPr>
@@ -2843,7 +2757,7 @@
       </p:sp>
       <p:sp>
         <p:nvSpPr>
-          <p:cNvPr id="8" name="chain"/>
+          <p:cNvPr id="7" name="chain"/>
           <p:cNvSpPr/>
           <p:nvPr/>
         </p:nvSpPr>
@@ -2870,7 +2784,7 @@
       </p:sp>
       <p:sp>
         <p:nvSpPr>
-          <p:cNvPr id="9" name="Text 7"/>
+          <p:cNvPr id="8" name="Text 5"/>
           <p:cNvSpPr txBox="1"/>
           <p:nvPr/>
         </p:nvSpPr>
@@ -2932,7 +2846,7 @@
       </p:sp>
       <p:sp>
         <p:nvSpPr>
-          <p:cNvPr id="10" name="Text 8"/>
+          <p:cNvPr id="9" name="Text 6"/>
           <p:cNvSpPr txBox="1"/>
           <p:nvPr/>
         </p:nvSpPr>
@@ -5526,80 +5440,40 @@
           </a:ln>
         </p:spPr>
       </p:sp>
-      <p:sp>
-        <p:nvSpPr>
-          <p:cNvPr id="4" name="badge-ПЛК"/>
-          <p:cNvSpPr/>
-          <p:nvPr/>
-        </p:nvSpPr>
-        <p:spPr>
-          <a:xfrm>
-            <a:off x="667512" y="1508760"/>
-            <a:ext cx="420624" cy="420624"/>
-          </a:xfrm>
-          <a:prstGeom prst="ellipse">
-            <a:avLst/>
-          </a:prstGeom>
-          <a:solidFill>
-            <a:srgbClr val="1F6F8B"/>
-          </a:solidFill>
-          <a:ln w="12700">
-            <a:solidFill>
-              <a:srgbClr val="1F6F8B"/>
-            </a:solidFill>
-            <a:prstDash val="solid"/>
-          </a:ln>
-        </p:spPr>
-      </p:sp>
-      <p:sp>
-        <p:nvSpPr>
-          <p:cNvPr id="5" name="Text 3"/>
+      <p:pic>
+        <p:nvPicPr>
+          <p:cNvPr id="4" name="icon-ПЛК" descr="/home/user/mysteryslavic-2026-07-19_16-47-00/presentation/images/icons/plc.png">    </p:cNvPr>
+          <p:cNvPicPr>
+            <a:picLocks noChangeAspect="1"/>
+          </p:cNvPicPr>
+          <p:nvPr/>
+        </p:nvPicPr>
+        <p:blipFill>
+          <a:blip r:embed="rId1"/>
+          <a:stretch>
+            <a:fillRect/>
+          </a:stretch>
+        </p:blipFill>
+        <p:spPr>
+          <a:xfrm>
+            <a:off x="649224" y="1481328"/>
+            <a:ext cx="457200" cy="457200"/>
+          </a:xfrm>
+          <a:prstGeom prst="rect">
+            <a:avLst/>
+          </a:prstGeom>
+        </p:spPr>
+      </p:pic>
+      <p:sp>
+        <p:nvSpPr>
+          <p:cNvPr id="5" name="Text 2"/>
           <p:cNvSpPr txBox="1"/>
           <p:nvPr/>
         </p:nvSpPr>
         <p:spPr>
           <a:xfrm>
-            <a:off x="667512" y="1508760"/>
-            <a:ext cx="420624" cy="420624"/>
-          </a:xfrm>
-          <a:prstGeom prst="rect">
-            <a:avLst/>
-          </a:prstGeom>
-          <a:noFill/>
-          <a:ln/>
-        </p:spPr>
-        <p:txBody>
-          <a:bodyPr wrap="square" lIns="0" tIns="0" rIns="0" bIns="0" rtlCol="0" anchor="ctr"/>
-          <a:lstStyle/>
-          <a:p>
-            <a:pPr algn="ctr" indent="0" marL="0">
-              <a:buNone/>
-            </a:pPr>
-            <a:r>
-              <a:rPr lang="en-US" sz="950" b="1" dirty="0">
-                <a:solidFill>
-                  <a:srgbClr val="FFFFFF"/>
-                </a:solidFill>
-                <a:latin typeface="Montserrat" pitchFamily="34" charset="0"/>
-                <a:ea typeface="Montserrat" pitchFamily="34" charset="-122"/>
-                <a:cs typeface="Montserrat" pitchFamily="34" charset="-120"/>
-              </a:rPr>
-              <a:t>ПЛК</a:t>
-            </a:r>
-            <a:endParaRPr lang="en-US" sz="950" dirty="0"/>
-          </a:p>
-        </p:txBody>
-      </p:sp>
-      <p:sp>
-        <p:nvSpPr>
-          <p:cNvPr id="6" name="Text 4"/>
-          <p:cNvSpPr txBox="1"/>
-          <p:nvPr/>
-        </p:nvSpPr>
-        <p:spPr>
-          <a:xfrm>
-            <a:off x="1179576" y="1508760"/>
-            <a:ext cx="1700784" cy="402336"/>
+            <a:off x="1197864" y="1508760"/>
+            <a:ext cx="1682496" cy="402336"/>
           </a:xfrm>
           <a:prstGeom prst="rect">
             <a:avLst/>
@@ -5634,7 +5508,7 @@
       </p:sp>
       <p:sp>
         <p:nvSpPr>
-          <p:cNvPr id="7" name="Text 5"/>
+          <p:cNvPr id="6" name="Text 3"/>
           <p:cNvSpPr txBox="1"/>
           <p:nvPr/>
         </p:nvSpPr>
@@ -5676,7 +5550,7 @@
       </p:sp>
       <p:sp>
         <p:nvSpPr>
-          <p:cNvPr id="8" name="card"/>
+          <p:cNvPr id="7" name="card"/>
           <p:cNvSpPr/>
           <p:nvPr/>
         </p:nvSpPr>
@@ -5701,80 +5575,40 @@
           </a:ln>
         </p:spPr>
       </p:sp>
-      <p:sp>
-        <p:nvSpPr>
-          <p:cNvPr id="9" name="badge-HMI"/>
-          <p:cNvSpPr/>
-          <p:nvPr/>
-        </p:nvSpPr>
-        <p:spPr>
-          <a:xfrm>
-            <a:off x="3355848" y="1508760"/>
-            <a:ext cx="420624" cy="420624"/>
-          </a:xfrm>
-          <a:prstGeom prst="ellipse">
-            <a:avLst/>
-          </a:prstGeom>
-          <a:solidFill>
-            <a:srgbClr val="1F6F8B"/>
-          </a:solidFill>
-          <a:ln w="12700">
-            <a:solidFill>
-              <a:srgbClr val="1F6F8B"/>
-            </a:solidFill>
-            <a:prstDash val="solid"/>
-          </a:ln>
-        </p:spPr>
-      </p:sp>
-      <p:sp>
-        <p:nvSpPr>
-          <p:cNvPr id="10" name="Text 8"/>
+      <p:pic>
+        <p:nvPicPr>
+          <p:cNvPr id="8" name="icon-HMI" descr="/home/user/mysteryslavic-2026-07-19_16-47-00/presentation/images/icons/hmi.png">    </p:cNvPr>
+          <p:cNvPicPr>
+            <a:picLocks noChangeAspect="1"/>
+          </p:cNvPicPr>
+          <p:nvPr/>
+        </p:nvPicPr>
+        <p:blipFill>
+          <a:blip r:embed="rId2"/>
+          <a:stretch>
+            <a:fillRect/>
+          </a:stretch>
+        </p:blipFill>
+        <p:spPr>
+          <a:xfrm>
+            <a:off x="3337560" y="1481328"/>
+            <a:ext cx="457200" cy="457200"/>
+          </a:xfrm>
+          <a:prstGeom prst="rect">
+            <a:avLst/>
+          </a:prstGeom>
+        </p:spPr>
+      </p:pic>
+      <p:sp>
+        <p:nvSpPr>
+          <p:cNvPr id="9" name="Text 5"/>
           <p:cNvSpPr txBox="1"/>
           <p:nvPr/>
         </p:nvSpPr>
         <p:spPr>
           <a:xfrm>
-            <a:off x="3355848" y="1508760"/>
-            <a:ext cx="420624" cy="420624"/>
-          </a:xfrm>
-          <a:prstGeom prst="rect">
-            <a:avLst/>
-          </a:prstGeom>
-          <a:noFill/>
-          <a:ln/>
-        </p:spPr>
-        <p:txBody>
-          <a:bodyPr wrap="square" lIns="0" tIns="0" rIns="0" bIns="0" rtlCol="0" anchor="ctr"/>
-          <a:lstStyle/>
-          <a:p>
-            <a:pPr algn="ctr" indent="0" marL="0">
-              <a:buNone/>
-            </a:pPr>
-            <a:r>
-              <a:rPr lang="en-US" sz="950" b="1" dirty="0">
-                <a:solidFill>
-                  <a:srgbClr val="FFFFFF"/>
-                </a:solidFill>
-                <a:latin typeface="Montserrat" pitchFamily="34" charset="0"/>
-                <a:ea typeface="Montserrat" pitchFamily="34" charset="-122"/>
-                <a:cs typeface="Montserrat" pitchFamily="34" charset="-120"/>
-              </a:rPr>
-              <a:t>HMI</a:t>
-            </a:r>
-            <a:endParaRPr lang="en-US" sz="950" dirty="0"/>
-          </a:p>
-        </p:txBody>
-      </p:sp>
-      <p:sp>
-        <p:nvSpPr>
-          <p:cNvPr id="11" name="Text 9"/>
-          <p:cNvSpPr txBox="1"/>
-          <p:nvPr/>
-        </p:nvSpPr>
-        <p:spPr>
-          <a:xfrm>
-            <a:off x="3867912" y="1508760"/>
-            <a:ext cx="1700784" cy="402336"/>
+            <a:off x="3886200" y="1508760"/>
+            <a:ext cx="1682496" cy="402336"/>
           </a:xfrm>
           <a:prstGeom prst="rect">
             <a:avLst/>
@@ -5809,7 +5643,7 @@
       </p:sp>
       <p:sp>
         <p:nvSpPr>
-          <p:cNvPr id="12" name="Text 10"/>
+          <p:cNvPr id="10" name="Text 6"/>
           <p:cNvSpPr txBox="1"/>
           <p:nvPr/>
         </p:nvSpPr>
@@ -5851,7 +5685,7 @@
       </p:sp>
       <p:sp>
         <p:nvSpPr>
-          <p:cNvPr id="13" name="card"/>
+          <p:cNvPr id="11" name="card"/>
           <p:cNvSpPr/>
           <p:nvPr/>
         </p:nvSpPr>
@@ -5876,80 +5710,40 @@
           </a:ln>
         </p:spPr>
       </p:sp>
-      <p:sp>
-        <p:nvSpPr>
-          <p:cNvPr id="14" name="badge-VFD"/>
-          <p:cNvSpPr/>
-          <p:nvPr/>
-        </p:nvSpPr>
-        <p:spPr>
-          <a:xfrm>
-            <a:off x="6044184" y="1508760"/>
-            <a:ext cx="420624" cy="420624"/>
-          </a:xfrm>
-          <a:prstGeom prst="ellipse">
-            <a:avLst/>
-          </a:prstGeom>
-          <a:solidFill>
-            <a:srgbClr val="1F6F8B"/>
-          </a:solidFill>
-          <a:ln w="12700">
-            <a:solidFill>
-              <a:srgbClr val="1F6F8B"/>
-            </a:solidFill>
-            <a:prstDash val="solid"/>
-          </a:ln>
-        </p:spPr>
-      </p:sp>
-      <p:sp>
-        <p:nvSpPr>
-          <p:cNvPr id="15" name="Text 13"/>
+      <p:pic>
+        <p:nvPicPr>
+          <p:cNvPr id="12" name="icon-VFD" descr="/home/user/mysteryslavic-2026-07-19_16-47-00/presentation/images/icons/vfd.png">    </p:cNvPr>
+          <p:cNvPicPr>
+            <a:picLocks noChangeAspect="1"/>
+          </p:cNvPicPr>
+          <p:nvPr/>
+        </p:nvPicPr>
+        <p:blipFill>
+          <a:blip r:embed="rId3"/>
+          <a:stretch>
+            <a:fillRect/>
+          </a:stretch>
+        </p:blipFill>
+        <p:spPr>
+          <a:xfrm>
+            <a:off x="6025896" y="1481328"/>
+            <a:ext cx="457200" cy="457200"/>
+          </a:xfrm>
+          <a:prstGeom prst="rect">
+            <a:avLst/>
+          </a:prstGeom>
+        </p:spPr>
+      </p:pic>
+      <p:sp>
+        <p:nvSpPr>
+          <p:cNvPr id="13" name="Text 8"/>
           <p:cNvSpPr txBox="1"/>
           <p:nvPr/>
         </p:nvSpPr>
         <p:spPr>
           <a:xfrm>
-            <a:off x="6044184" y="1508760"/>
-            <a:ext cx="420624" cy="420624"/>
-          </a:xfrm>
-          <a:prstGeom prst="rect">
-            <a:avLst/>
-          </a:prstGeom>
-          <a:noFill/>
-          <a:ln/>
-        </p:spPr>
-        <p:txBody>
-          <a:bodyPr wrap="square" lIns="0" tIns="0" rIns="0" bIns="0" rtlCol="0" anchor="ctr"/>
-          <a:lstStyle/>
-          <a:p>
-            <a:pPr algn="ctr" indent="0" marL="0">
-              <a:buNone/>
-            </a:pPr>
-            <a:r>
-              <a:rPr lang="en-US" sz="950" b="1" dirty="0">
-                <a:solidFill>
-                  <a:srgbClr val="FFFFFF"/>
-                </a:solidFill>
-                <a:latin typeface="Montserrat" pitchFamily="34" charset="0"/>
-                <a:ea typeface="Montserrat" pitchFamily="34" charset="-122"/>
-                <a:cs typeface="Montserrat" pitchFamily="34" charset="-120"/>
-              </a:rPr>
-              <a:t>VFD</a:t>
-            </a:r>
-            <a:endParaRPr lang="en-US" sz="950" dirty="0"/>
-          </a:p>
-        </p:txBody>
-      </p:sp>
-      <p:sp>
-        <p:nvSpPr>
-          <p:cNvPr id="16" name="Text 14"/>
-          <p:cNvSpPr txBox="1"/>
-          <p:nvPr/>
-        </p:nvSpPr>
-        <p:spPr>
-          <a:xfrm>
-            <a:off x="6556248" y="1508760"/>
-            <a:ext cx="1700784" cy="402336"/>
+            <a:off x="6574536" y="1508760"/>
+            <a:ext cx="1682496" cy="402336"/>
           </a:xfrm>
           <a:prstGeom prst="rect">
             <a:avLst/>
@@ -5984,7 +5778,7 @@
       </p:sp>
       <p:sp>
         <p:nvSpPr>
-          <p:cNvPr id="17" name="Text 15"/>
+          <p:cNvPr id="14" name="Text 9"/>
           <p:cNvSpPr txBox="1"/>
           <p:nvPr/>
         </p:nvSpPr>
@@ -6026,7 +5820,7 @@
       </p:sp>
       <p:sp>
         <p:nvSpPr>
-          <p:cNvPr id="18" name="card"/>
+          <p:cNvPr id="15" name="card"/>
           <p:cNvSpPr/>
           <p:nvPr/>
         </p:nvSpPr>
@@ -6051,80 +5845,40 @@
           </a:ln>
         </p:spPr>
       </p:sp>
-      <p:sp>
-        <p:nvSpPr>
-          <p:cNvPr id="19" name="badge-SERVO"/>
-          <p:cNvSpPr/>
-          <p:nvPr/>
-        </p:nvSpPr>
-        <p:spPr>
-          <a:xfrm>
-            <a:off x="667512" y="2807208"/>
-            <a:ext cx="420624" cy="420624"/>
-          </a:xfrm>
-          <a:prstGeom prst="ellipse">
-            <a:avLst/>
-          </a:prstGeom>
-          <a:solidFill>
-            <a:srgbClr val="1F6F8B"/>
-          </a:solidFill>
-          <a:ln w="12700">
-            <a:solidFill>
-              <a:srgbClr val="1F6F8B"/>
-            </a:solidFill>
-            <a:prstDash val="solid"/>
-          </a:ln>
-        </p:spPr>
-      </p:sp>
-      <p:sp>
-        <p:nvSpPr>
-          <p:cNvPr id="20" name="Text 18"/>
+      <p:pic>
+        <p:nvPicPr>
+          <p:cNvPr id="16" name="icon-SERVO" descr="/home/user/mysteryslavic-2026-07-19_16-47-00/presentation/images/icons/servo.png">    </p:cNvPr>
+          <p:cNvPicPr>
+            <a:picLocks noChangeAspect="1"/>
+          </p:cNvPicPr>
+          <p:nvPr/>
+        </p:nvPicPr>
+        <p:blipFill>
+          <a:blip r:embed="rId4"/>
+          <a:stretch>
+            <a:fillRect/>
+          </a:stretch>
+        </p:blipFill>
+        <p:spPr>
+          <a:xfrm>
+            <a:off x="649224" y="2779776"/>
+            <a:ext cx="457200" cy="457200"/>
+          </a:xfrm>
+          <a:prstGeom prst="rect">
+            <a:avLst/>
+          </a:prstGeom>
+        </p:spPr>
+      </p:pic>
+      <p:sp>
+        <p:nvSpPr>
+          <p:cNvPr id="17" name="Text 11"/>
           <p:cNvSpPr txBox="1"/>
           <p:nvPr/>
         </p:nvSpPr>
         <p:spPr>
           <a:xfrm>
-            <a:off x="667512" y="2807208"/>
-            <a:ext cx="420624" cy="420624"/>
-          </a:xfrm>
-          <a:prstGeom prst="rect">
-            <a:avLst/>
-          </a:prstGeom>
-          <a:noFill/>
-          <a:ln/>
-        </p:spPr>
-        <p:txBody>
-          <a:bodyPr wrap="square" lIns="0" tIns="0" rIns="0" bIns="0" rtlCol="0" anchor="ctr"/>
-          <a:lstStyle/>
-          <a:p>
-            <a:pPr algn="ctr" indent="0" marL="0">
-              <a:buNone/>
-            </a:pPr>
-            <a:r>
-              <a:rPr lang="en-US" sz="750" b="1" dirty="0">
-                <a:solidFill>
-                  <a:srgbClr val="FFFFFF"/>
-                </a:solidFill>
-                <a:latin typeface="Montserrat" pitchFamily="34" charset="0"/>
-                <a:ea typeface="Montserrat" pitchFamily="34" charset="-122"/>
-                <a:cs typeface="Montserrat" pitchFamily="34" charset="-120"/>
-              </a:rPr>
-              <a:t>SERVO</a:t>
-            </a:r>
-            <a:endParaRPr lang="en-US" sz="750" dirty="0"/>
-          </a:p>
-        </p:txBody>
-      </p:sp>
-      <p:sp>
-        <p:nvSpPr>
-          <p:cNvPr id="21" name="Text 19"/>
-          <p:cNvSpPr txBox="1"/>
-          <p:nvPr/>
-        </p:nvSpPr>
-        <p:spPr>
-          <a:xfrm>
-            <a:off x="1179576" y="2807208"/>
-            <a:ext cx="1700784" cy="402336"/>
+            <a:off x="1197864" y="2807208"/>
+            <a:ext cx="1682496" cy="402336"/>
           </a:xfrm>
           <a:prstGeom prst="rect">
             <a:avLst/>
@@ -6159,7 +5913,7 @@
       </p:sp>
       <p:sp>
         <p:nvSpPr>
-          <p:cNvPr id="22" name="Text 20"/>
+          <p:cNvPr id="18" name="Text 12"/>
           <p:cNvSpPr txBox="1"/>
           <p:nvPr/>
         </p:nvSpPr>
@@ -6201,7 +5955,7 @@
       </p:sp>
       <p:sp>
         <p:nvSpPr>
-          <p:cNvPr id="23" name="card"/>
+          <p:cNvPr id="19" name="card"/>
           <p:cNvSpPr/>
           <p:nvPr/>
         </p:nvSpPr>
@@ -6226,80 +5980,40 @@
           </a:ln>
         </p:spPr>
       </p:sp>
-      <p:sp>
-        <p:nvSpPr>
-          <p:cNvPr id="24" name="badge-I/O"/>
-          <p:cNvSpPr/>
-          <p:nvPr/>
-        </p:nvSpPr>
-        <p:spPr>
-          <a:xfrm>
-            <a:off x="3355848" y="2807208"/>
-            <a:ext cx="420624" cy="420624"/>
-          </a:xfrm>
-          <a:prstGeom prst="ellipse">
-            <a:avLst/>
-          </a:prstGeom>
-          <a:solidFill>
-            <a:srgbClr val="1F6F8B"/>
-          </a:solidFill>
-          <a:ln w="12700">
-            <a:solidFill>
-              <a:srgbClr val="1F6F8B"/>
-            </a:solidFill>
-            <a:prstDash val="solid"/>
-          </a:ln>
-        </p:spPr>
-      </p:sp>
-      <p:sp>
-        <p:nvSpPr>
-          <p:cNvPr id="25" name="Text 23"/>
+      <p:pic>
+        <p:nvPicPr>
+          <p:cNvPr id="20" name="icon-I/O" descr="/home/user/mysteryslavic-2026-07-19_16-47-00/presentation/images/icons/io.png">    </p:cNvPr>
+          <p:cNvPicPr>
+            <a:picLocks noChangeAspect="1"/>
+          </p:cNvPicPr>
+          <p:nvPr/>
+        </p:nvPicPr>
+        <p:blipFill>
+          <a:blip r:embed="rId5"/>
+          <a:stretch>
+            <a:fillRect/>
+          </a:stretch>
+        </p:blipFill>
+        <p:spPr>
+          <a:xfrm>
+            <a:off x="3337560" y="2779776"/>
+            <a:ext cx="457200" cy="457200"/>
+          </a:xfrm>
+          <a:prstGeom prst="rect">
+            <a:avLst/>
+          </a:prstGeom>
+        </p:spPr>
+      </p:pic>
+      <p:sp>
+        <p:nvSpPr>
+          <p:cNvPr id="21" name="Text 14"/>
           <p:cNvSpPr txBox="1"/>
           <p:nvPr/>
         </p:nvSpPr>
         <p:spPr>
           <a:xfrm>
-            <a:off x="3355848" y="2807208"/>
-            <a:ext cx="420624" cy="420624"/>
-          </a:xfrm>
-          <a:prstGeom prst="rect">
-            <a:avLst/>
-          </a:prstGeom>
-          <a:noFill/>
-          <a:ln/>
-        </p:spPr>
-        <p:txBody>
-          <a:bodyPr wrap="square" lIns="0" tIns="0" rIns="0" bIns="0" rtlCol="0" anchor="ctr"/>
-          <a:lstStyle/>
-          <a:p>
-            <a:pPr algn="ctr" indent="0" marL="0">
-              <a:buNone/>
-            </a:pPr>
-            <a:r>
-              <a:rPr lang="en-US" sz="950" b="1" dirty="0">
-                <a:solidFill>
-                  <a:srgbClr val="FFFFFF"/>
-                </a:solidFill>
-                <a:latin typeface="Montserrat" pitchFamily="34" charset="0"/>
-                <a:ea typeface="Montserrat" pitchFamily="34" charset="-122"/>
-                <a:cs typeface="Montserrat" pitchFamily="34" charset="-120"/>
-              </a:rPr>
-              <a:t>I/O</a:t>
-            </a:r>
-            <a:endParaRPr lang="en-US" sz="950" dirty="0"/>
-          </a:p>
-        </p:txBody>
-      </p:sp>
-      <p:sp>
-        <p:nvSpPr>
-          <p:cNvPr id="26" name="Text 24"/>
-          <p:cNvSpPr txBox="1"/>
-          <p:nvPr/>
-        </p:nvSpPr>
-        <p:spPr>
-          <a:xfrm>
-            <a:off x="3867912" y="2807208"/>
-            <a:ext cx="1700784" cy="402336"/>
+            <a:off x="3886200" y="2807208"/>
+            <a:ext cx="1682496" cy="402336"/>
           </a:xfrm>
           <a:prstGeom prst="rect">
             <a:avLst/>
@@ -6334,7 +6048,7 @@
       </p:sp>
       <p:sp>
         <p:nvSpPr>
-          <p:cNvPr id="27" name="Text 25"/>
+          <p:cNvPr id="22" name="Text 15"/>
           <p:cNvSpPr txBox="1"/>
           <p:nvPr/>
         </p:nvSpPr>
@@ -6376,7 +6090,7 @@
       </p:sp>
       <p:sp>
         <p:nvSpPr>
-          <p:cNvPr id="28" name="card"/>
+          <p:cNvPr id="23" name="card"/>
           <p:cNvSpPr/>
           <p:nvPr/>
         </p:nvSpPr>
@@ -6401,80 +6115,40 @@
           </a:ln>
         </p:spPr>
       </p:sp>
-      <p:sp>
-        <p:nvSpPr>
-          <p:cNvPr id="29" name="badge-IPC"/>
-          <p:cNvSpPr/>
-          <p:nvPr/>
-        </p:nvSpPr>
-        <p:spPr>
-          <a:xfrm>
-            <a:off x="6044184" y="2807208"/>
-            <a:ext cx="420624" cy="420624"/>
-          </a:xfrm>
-          <a:prstGeom prst="ellipse">
-            <a:avLst/>
-          </a:prstGeom>
-          <a:solidFill>
-            <a:srgbClr val="1F6F8B"/>
-          </a:solidFill>
-          <a:ln w="12700">
-            <a:solidFill>
-              <a:srgbClr val="1F6F8B"/>
-            </a:solidFill>
-            <a:prstDash val="solid"/>
-          </a:ln>
-        </p:spPr>
-      </p:sp>
-      <p:sp>
-        <p:nvSpPr>
-          <p:cNvPr id="30" name="Text 28"/>
+      <p:pic>
+        <p:nvPicPr>
+          <p:cNvPr id="24" name="icon-IPC" descr="/home/user/mysteryslavic-2026-07-19_16-47-00/presentation/images/icons/ipc.png">    </p:cNvPr>
+          <p:cNvPicPr>
+            <a:picLocks noChangeAspect="1"/>
+          </p:cNvPicPr>
+          <p:nvPr/>
+        </p:nvPicPr>
+        <p:blipFill>
+          <a:blip r:embed="rId6"/>
+          <a:stretch>
+            <a:fillRect/>
+          </a:stretch>
+        </p:blipFill>
+        <p:spPr>
+          <a:xfrm>
+            <a:off x="6025896" y="2779776"/>
+            <a:ext cx="457200" cy="457200"/>
+          </a:xfrm>
+          <a:prstGeom prst="rect">
+            <a:avLst/>
+          </a:prstGeom>
+        </p:spPr>
+      </p:pic>
+      <p:sp>
+        <p:nvSpPr>
+          <p:cNvPr id="25" name="Text 17"/>
           <p:cNvSpPr txBox="1"/>
           <p:nvPr/>
         </p:nvSpPr>
         <p:spPr>
           <a:xfrm>
-            <a:off x="6044184" y="2807208"/>
-            <a:ext cx="420624" cy="420624"/>
-          </a:xfrm>
-          <a:prstGeom prst="rect">
-            <a:avLst/>
-          </a:prstGeom>
-          <a:noFill/>
-          <a:ln/>
-        </p:spPr>
-        <p:txBody>
-          <a:bodyPr wrap="square" lIns="0" tIns="0" rIns="0" bIns="0" rtlCol="0" anchor="ctr"/>
-          <a:lstStyle/>
-          <a:p>
-            <a:pPr algn="ctr" indent="0" marL="0">
-              <a:buNone/>
-            </a:pPr>
-            <a:r>
-              <a:rPr lang="en-US" sz="950" b="1" dirty="0">
-                <a:solidFill>
-                  <a:srgbClr val="FFFFFF"/>
-                </a:solidFill>
-                <a:latin typeface="Montserrat" pitchFamily="34" charset="0"/>
-                <a:ea typeface="Montserrat" pitchFamily="34" charset="-122"/>
-                <a:cs typeface="Montserrat" pitchFamily="34" charset="-120"/>
-              </a:rPr>
-              <a:t>IPC</a:t>
-            </a:r>
-            <a:endParaRPr lang="en-US" sz="950" dirty="0"/>
-          </a:p>
-        </p:txBody>
-      </p:sp>
-      <p:sp>
-        <p:nvSpPr>
-          <p:cNvPr id="31" name="Text 29"/>
-          <p:cNvSpPr txBox="1"/>
-          <p:nvPr/>
-        </p:nvSpPr>
-        <p:spPr>
-          <a:xfrm>
-            <a:off x="6556248" y="2807208"/>
-            <a:ext cx="1700784" cy="402336"/>
+            <a:off x="6574536" y="2807208"/>
+            <a:ext cx="1682496" cy="402336"/>
           </a:xfrm>
           <a:prstGeom prst="rect">
             <a:avLst/>
@@ -6509,7 +6183,7 @@
       </p:sp>
       <p:sp>
         <p:nvSpPr>
-          <p:cNvPr id="32" name="Text 30"/>
+          <p:cNvPr id="26" name="Text 18"/>
           <p:cNvSpPr txBox="1"/>
           <p:nvPr/>
         </p:nvSpPr>
@@ -6549,118 +6223,32 @@
           </a:p>
         </p:txBody>
       </p:sp>
-      <p:sp>
-        <p:nvSpPr>
-          <p:cNvPr id="33" name="img-placeholder-s3"/>
-          <p:cNvSpPr/>
-          <p:nvPr/>
-        </p:nvSpPr>
+      <p:pic>
+        <p:nvPicPr>
+          <p:cNvPr id="27" name="photo-s3" descr="/home/user/mysteryslavic-2026-07-19_16-47-00/presentation/images/02-components.jpg">    </p:cNvPr>
+          <p:cNvPicPr>
+            <a:picLocks noChangeAspect="1"/>
+          </p:cNvPicPr>
+          <p:nvPr/>
+        </p:nvPicPr>
+        <p:blipFill>
+          <a:blip r:embed="rId7"/>
+          <a:srcRect l="0" r="0" t="0" b="0"/>
+          <a:stretch/>
+        </p:blipFill>
         <p:spPr>
           <a:xfrm>
             <a:off x="8659368" y="1335024"/>
             <a:ext cx="3029407" cy="2450592"/>
           </a:xfrm>
-          <a:prstGeom prst="roundRect">
-            <a:avLst>
-              <a:gd name="adj" fmla="val 2239"/>
-            </a:avLst>
-          </a:prstGeom>
-          <a:solidFill>
-            <a:schemeClr val="bg2"/>
-          </a:solidFill>
-          <a:ln w="12700">
-            <a:solidFill>
-              <a:srgbClr val="DCE3EA"/>
-            </a:solidFill>
-            <a:prstDash val="dash"/>
-          </a:ln>
-        </p:spPr>
-      </p:sp>
-      <p:sp>
-        <p:nvSpPr>
-          <p:cNvPr id="34" name="Text 32"/>
-          <p:cNvSpPr txBox="1"/>
-          <p:nvPr/>
-        </p:nvSpPr>
-        <p:spPr>
-          <a:xfrm>
-            <a:off x="8823960" y="1335024"/>
-            <a:ext cx="2700223" cy="2450592"/>
-          </a:xfrm>
-          <a:prstGeom prst="rect">
-            <a:avLst/>
-          </a:prstGeom>
-          <a:noFill/>
-          <a:ln/>
-        </p:spPr>
-        <p:txBody>
-          <a:bodyPr wrap="square" lIns="0" tIns="0" rIns="0" bIns="0" rtlCol="0" anchor="ctr"/>
-          <a:lstStyle/>
-          <a:p>
-            <a:pPr algn="ctr" indent="0" marL="0">
-              <a:lnSpc>
-                <a:spcPct val="125000"/>
-              </a:lnSpc>
-              <a:buNone/>
-            </a:pPr>
-            <a:r>
-              <a:rPr lang="en-US" sz="1000" dirty="0">
-                <a:solidFill>
-                  <a:schemeClr val="tx2"/>
-                </a:solidFill>
-                <a:latin typeface="Arial" pitchFamily="34" charset="0"/>
-                <a:ea typeface="Arial" pitchFamily="34" charset="-122"/>
-                <a:cs typeface="Arial" pitchFamily="34" charset="-120"/>
-              </a:rPr>
-              <a:t>IMAGE 02 · 4:3</a:t>
-            </a:r>
-            <a:endParaRPr lang="en-US" sz="1000" dirty="0"/>
-          </a:p>
-          <a:p>
-            <a:pPr algn="ctr" indent="0" marL="0">
-              <a:lnSpc>
-                <a:spcPct val="125000"/>
-              </a:lnSpc>
-              <a:buNone/>
-            </a:pPr>
-            <a:r>
-              <a:rPr lang="en-US" sz="1000" dirty="0">
-                <a:solidFill>
-                  <a:schemeClr val="tx2"/>
-                </a:solidFill>
-                <a:latin typeface="Arial" pitchFamily="34" charset="0"/>
-                <a:ea typeface="Arial" pitchFamily="34" charset="-122"/>
-                <a:cs typeface="Arial" pitchFamily="34" charset="-120"/>
-              </a:rPr>
-              <a:t>Компоненты автоматики</a:t>
-            </a:r>
-            <a:endParaRPr lang="en-US" sz="1000" dirty="0"/>
-          </a:p>
-          <a:p>
-            <a:pPr algn="ctr" indent="0" marL="0">
-              <a:lnSpc>
-                <a:spcPct val="125000"/>
-              </a:lnSpc>
-              <a:buNone/>
-            </a:pPr>
-            <a:r>
-              <a:rPr lang="en-US" sz="1000" dirty="0">
-                <a:solidFill>
-                  <a:schemeClr val="tx2"/>
-                </a:solidFill>
-                <a:latin typeface="Arial" pitchFamily="34" charset="0"/>
-                <a:ea typeface="Arial" pitchFamily="34" charset="-122"/>
-                <a:cs typeface="Arial" pitchFamily="34" charset="-120"/>
-              </a:rPr>
-              <a:t>на инженерном столе.</a:t>
-            </a:r>
-            <a:endParaRPr lang="en-US" sz="1000" dirty="0"/>
-          </a:p>
-        </p:txBody>
-      </p:sp>
-      <p:sp>
-        <p:nvSpPr>
-          <p:cNvPr id="35" name="card"/>
+          <a:prstGeom prst="rect">
+            <a:avLst/>
+          </a:prstGeom>
+        </p:spPr>
+      </p:pic>
+      <p:sp>
+        <p:nvSpPr>
+          <p:cNvPr id="28" name="card"/>
           <p:cNvSpPr/>
           <p:nvPr/>
         </p:nvSpPr>
@@ -6687,7 +6275,7 @@
       </p:sp>
       <p:sp>
         <p:nvSpPr>
-          <p:cNvPr id="36" name="Text 34"/>
+          <p:cNvPr id="29" name="Text 20"/>
           <p:cNvSpPr txBox="1"/>
           <p:nvPr/>
         </p:nvSpPr>
@@ -6746,7 +6334,7 @@
       </p:sp>
       <p:sp>
         <p:nvSpPr>
-          <p:cNvPr id="37" name="audit-question"/>
+          <p:cNvPr id="30" name="audit-question"/>
           <p:cNvSpPr/>
           <p:nvPr/>
         </p:nvSpPr>
@@ -6773,7 +6361,7 @@
       </p:sp>
       <p:sp>
         <p:nvSpPr>
-          <p:cNvPr id="38" name="Text 36"/>
+          <p:cNvPr id="31" name="Text 22"/>
           <p:cNvSpPr txBox="1"/>
           <p:nvPr/>
         </p:nvSpPr>
